--- a/docs/changbae/65-QA-종합-임원보고.pptx
+++ b/docs/changbae/65-QA-종합-임원보고.pptx
@@ -5501,7 +5501,7 @@
                 </a:solidFill>
                 <a:latin typeface="맑은 고딕"/>
               </a:rPr>
-              <a:t>종합 우위는 pool — 단, 의제 16축 이하 조건부 (근거: 슬라이드 13)</a:t>
+              <a:t>종합 우위는 pool — 메모리 결함은 보완 택틱으로 해소 실측 (슬라이드 13)</a:t>
             </a:r>
           </a:p>
         </p:txBody>
@@ -6677,7 +6677,7 @@
                 </a:solidFill>
                 <a:latin typeface="맑은 고딕"/>
               </a:rPr>
-              <a:t>pool은 18축부터 한도 초과 — 안전 확인된 마지막 지점 16축이 적용 경계</a:t>
+              <a:t>pool 한도 초과는 보완 택틱(P6)으로 해소 실측 — 원판 기준 경계만 16축</a:t>
             </a:r>
           </a:p>
         </p:txBody>
@@ -6807,7 +6807,7 @@
                 </a:solidFill>
                 <a:latin typeface="맑은 고딕"/>
               </a:rPr>
-              <a:t>의제 16축 이하에서 pool 채택 (스윕 실측: 16축까지 전부 정상, 18축부터 초과). 그 이상은 seq2 전환 또는 pool에 k 상한·의제 분할 보완 (63번 부록 K)</a:t>
+              <a:t>P6(k 비대칭 배분) 실측: r P95 48.2%→1.32%(★1→★2) · 한도 초과 11→0건 · 실물화 ~0.35MB 평탄 — 16축 조건의 메모리 근거 소멸 (66번 §7)</a:t>
             </a:r>
           </a:p>
         </p:txBody>
@@ -7500,7 +7500,7 @@
                 </a:solidFill>
                 <a:latin typeface="맑은 고딕"/>
               </a:rPr>
-              <a:t>복합 의제 DP — pool 조건부 채택 (16축 이하)</a:t>
+              <a:t>복합 의제 DP — pool 채택 + P6 보완 (메모리 결함 해소 실측)</a:t>
             </a:r>
           </a:p>
         </p:txBody>
@@ -7730,7 +7730,7 @@
                           </a:solidFill>
                           <a:latin typeface="맑은 고딕"/>
                         </a:rPr>
-                        <a:t>★1 (결함 11)</a:t>
+                        <a:t>★1 → ★2 (P6: 결함 0)</a:t>
                       </a:r>
                     </a:p>
                   </a:txBody>
@@ -7955,7 +7955,7 @@
                 </a:solidFill>
                 <a:latin typeface="맑은 고딕"/>
               </a:rPr>
-              <a:t>"기다렸다 최적을 고르는 설계(방안 2 계열)가 품질을 이기고, 그 대가(노출·메모리·꼬리 지연)는 택틱과 적용 조건으로 통제 가능하다."</a:t>
+              <a:t>"기다렸다 최적을 고르는 설계(방안 2 계열)가 품질을 이기고, 그 대가(노출·메모리·꼬리 지연)는 택틱으로 통제 가능하다 — 두 DP 모두 실측 입증(2+·pool+P6)."</a:t>
             </a:r>
           </a:p>
         </p:txBody>
@@ -8010,7 +8010,7 @@
                 </a:solidFill>
                 <a:latin typeface="맑은 고딕"/>
               </a:rPr>
-              <a:t>*구 4-10축 스윕의 관측 하한(상한 도달, censored) — 정식 재판정 후속 과제  ·  수치 출처: 60·62·63 (모든 값은 raw에서 재검산 가능)</a:t>
+              <a:t>*구 4-10축 스윕의 관측 하한(상한 도달, censored) — 정식 재판정 후속 과제  ·  수치 출처: 60·62·63·66 (모든 값은 raw에서 재검산 가능)</a:t>
             </a:r>
           </a:p>
         </p:txBody>

--- a/docs/changbae/65-QA-종합-임원보고.pptx
+++ b/docs/changbae/65-QA-종합-임원보고.pptx
@@ -5501,7 +5501,7 @@
                 </a:solidFill>
                 <a:latin typeface="맑은 고딕"/>
               </a:rPr>
-              <a:t>종합 우위는 pool — 메모리 결함은 보완 택틱으로 해소 실측 (슬라이드 13)</a:t>
+              <a:t>종합 우위는 pool — 메모리 결함은 보완 택틱(P6)으로 해소 실측 완료 (슬라이드 13)</a:t>
             </a:r>
           </a:p>
         </p:txBody>
@@ -5869,7 +5869,7 @@
                           </a:solidFill>
                           <a:latin typeface="맑은 고딕"/>
                         </a:rPr>
-                        <a:t>0.30% ★3</a:t>
+                        <a:t>0.30% ★5</a:t>
                       </a:r>
                     </a:p>
                   </a:txBody>
@@ -6677,7 +6677,7 @@
                 </a:solidFill>
                 <a:latin typeface="맑은 고딕"/>
               </a:rPr>
-              <a:t>pool 한도 초과는 보완 택틱(P6)으로 해소 실측 — 원판 기준 경계만 16축</a:t>
+              <a:t>pool의 한도 초과(18축+)는 보완 택틱 P6로 해소 — 초과 0건 실측, 20축까지 안전</a:t>
             </a:r>
           </a:p>
         </p:txBody>
@@ -6776,13 +6776,22 @@
               </a:spcAft>
             </a:pPr>
             <a:r>
-              <a:rPr sz="1250" b="0">
-                <a:solidFill>
-                  <a:srgbClr val="262626"/>
+              <a:rPr sz="1250" b="1">
+                <a:solidFill>
+                  <a:srgbClr val="2E74B5"/>
                 </a:solidFill>
                 <a:latin typeface="맑은 고딕"/>
               </a:rPr>
-              <a:t>소규모에서는 오히려 pool이 가볍다(같은 케이스 짝 비교 중앙 0.55배) — 중앙값 기준 역전은 11축부터 (판정 P95 기준 8축부터)</a:t>
+              <a:t>보완 택틱 P6 (k 비대칭 배분 — PL 채택)  </a:t>
+            </a:r>
+            <a:r>
+              <a:rPr sz="1250" b="1">
+                <a:solidFill>
+                  <a:srgbClr val="262626"/>
+                </a:solidFill>
+                <a:latin typeface="맑은 고딕"/>
+              </a:rPr>
+              <a:t>축마다 같은 개수로 풀을 만들던 것을 "중요한 축에 몰아주고 예산을 지키는" 배분으로 교체 — FIN 500건 재측정: r P95 48.2% → 1.32% (37배, ★1→★4) · 최악 4.0% · 한도 초과 11 → 0건 · 비용은 정확성 −0.002·시간 +0.010 (등급 불변)</a:t>
             </a:r>
           </a:p>
           <a:p>
@@ -6798,7 +6807,7 @@
                 </a:solidFill>
                 <a:latin typeface="맑은 고딕"/>
               </a:rPr>
-              <a:t>적용 권고  </a:t>
+              <a:t>적용 권고 (갱신)  </a:t>
             </a:r>
             <a:r>
               <a:rPr sz="1250" b="1">
@@ -6807,7 +6816,7 @@
                 </a:solidFill>
                 <a:latin typeface="맑은 고딕"/>
               </a:rPr>
-              <a:t>P6(k 비대칭 배분) 실측: r P95 48.2%→1.32%(★1→★2) · 한도 초과 11→0건 · 실물화 ~0.35MB 평탄 — 16축 조건의 메모리 근거 소멸 (66번 §7)</a:t>
+              <a:t>pool + P6 — 16축 조건의 메모리 근거 소멸(20축까지 초과 0건). 잔여 과제는 P95 1.32%의 ★5 경계(≤1%) 직상뿐 (예산 상한 스윕 후속)</a:t>
             </a:r>
           </a:p>
         </p:txBody>
@@ -7500,7 +7509,7 @@
                 </a:solidFill>
                 <a:latin typeface="맑은 고딕"/>
               </a:rPr>
-              <a:t>복합 의제 DP — pool 채택 + P6 보완 (메모리 결함 해소 실측)</a:t>
+              <a:t>복합 의제 DP — pool 채택 + 택틱 = pool+P6</a:t>
             </a:r>
           </a:p>
         </p:txBody>
@@ -7524,9 +7533,10 @@
                 <a:tableStyleId>{5C22544A-7EE6-4342-B048-85BDC9FD1C3A}</a:tableStyleId>
               </a:tblPr>
               <a:tblGrid>
-                <a:gridCol w="1920240"/>
-                <a:gridCol w="1737360"/>
-                <a:gridCol w="1737360"/>
+                <a:gridCol w="1828800"/>
+                <a:gridCol w="1097280"/>
+                <a:gridCol w="1234440"/>
+                <a:gridCol w="1234440"/>
               </a:tblGrid>
               <a:tr h="475488">
                 <a:tc>
@@ -7536,7 +7546,7 @@
                     <a:p>
                       <a:pPr algn="ctr"/>
                       <a:r>
-                        <a:rPr sz="1250" b="1">
+                        <a:rPr sz="1150" b="1">
                           <a:solidFill>
                             <a:srgbClr val="FFFFFF"/>
                           </a:solidFill>
@@ -7559,7 +7569,7 @@
                     <a:p>
                       <a:pPr algn="ctr"/>
                       <a:r>
-                        <a:rPr sz="1250" b="1">
+                        <a:rPr sz="1150" b="1">
                           <a:solidFill>
                             <a:srgbClr val="FFFFFF"/>
                           </a:solidFill>
@@ -7582,13 +7592,36 @@
                     <a:p>
                       <a:pPr algn="ctr"/>
                       <a:r>
-                        <a:rPr sz="1250" b="1">
+                        <a:rPr sz="1150" b="1">
                           <a:solidFill>
                             <a:srgbClr val="FFFFFF"/>
                           </a:solidFill>
                           <a:latin typeface="맑은 고딕"/>
                         </a:rPr>
                         <a:t>pool</a:t>
+                      </a:r>
+                    </a:p>
+                  </a:txBody>
+                  <a:tcPr marL="50800" marR="50800" marT="12700" marB="12700" anchor="ctr">
+                    <a:solidFill>
+                      <a:srgbClr val="1F3864"/>
+                    </a:solidFill>
+                  </a:tcPr>
+                </a:tc>
+                <a:tc>
+                  <a:txBody>
+                    <a:bodyPr/>
+                    <a:lstStyle/>
+                    <a:p>
+                      <a:pPr algn="ctr"/>
+                      <a:r>
+                        <a:rPr sz="1150" b="1">
+                          <a:solidFill>
+                            <a:srgbClr val="FFFFFF"/>
+                          </a:solidFill>
+                          <a:latin typeface="맑은 고딕"/>
+                        </a:rPr>
+                        <a:t>pool+P6</a:t>
                       </a:r>
                     </a:p>
                   </a:txBody>
@@ -7607,7 +7640,7 @@
                     <a:p>
                       <a:pPr algn="ctr"/>
                       <a:r>
-                        <a:rPr sz="1250" b="0">
+                        <a:rPr sz="1150" b="0">
                           <a:solidFill>
                             <a:srgbClr val="262626"/>
                           </a:solidFill>
@@ -7630,7 +7663,7 @@
                     <a:p>
                       <a:pPr algn="ctr"/>
                       <a:r>
-                        <a:rPr sz="1250" b="0">
+                        <a:rPr sz="1150" b="0">
                           <a:solidFill>
                             <a:srgbClr val="262626"/>
                           </a:solidFill>
@@ -7653,7 +7686,30 @@
                     <a:p>
                       <a:pPr algn="ctr"/>
                       <a:r>
-                        <a:rPr sz="1250" b="1">
+                        <a:rPr sz="1150" b="1">
+                          <a:solidFill>
+                            <a:srgbClr val="262626"/>
+                          </a:solidFill>
+                          <a:latin typeface="맑은 고딕"/>
+                        </a:rPr>
+                        <a:t>★4</a:t>
+                      </a:r>
+                    </a:p>
+                  </a:txBody>
+                  <a:tcPr marL="50800" marR="50800" marT="12700" marB="12700" anchor="ctr">
+                    <a:solidFill>
+                      <a:srgbClr val="FFFFFF"/>
+                    </a:solidFill>
+                  </a:tcPr>
+                </a:tc>
+                <a:tc>
+                  <a:txBody>
+                    <a:bodyPr/>
+                    <a:lstStyle/>
+                    <a:p>
+                      <a:pPr algn="ctr"/>
+                      <a:r>
+                        <a:rPr sz="1150" b="1">
                           <a:solidFill>
                             <a:srgbClr val="262626"/>
                           </a:solidFill>
@@ -7678,7 +7734,7 @@
                     <a:p>
                       <a:pPr algn="ctr"/>
                       <a:r>
-                        <a:rPr sz="1250" b="0">
+                        <a:rPr sz="1150" b="0">
                           <a:solidFill>
                             <a:srgbClr val="262626"/>
                           </a:solidFill>
@@ -7701,13 +7757,13 @@
                     <a:p>
                       <a:pPr algn="ctr"/>
                       <a:r>
-                        <a:rPr sz="1250" b="1">
-                          <a:solidFill>
-                            <a:srgbClr val="262626"/>
-                          </a:solidFill>
-                          <a:latin typeface="맑은 고딕"/>
-                        </a:rPr>
-                        <a:t>★3</a:t>
+                        <a:rPr sz="1150" b="1">
+                          <a:solidFill>
+                            <a:srgbClr val="262626"/>
+                          </a:solidFill>
+                          <a:latin typeface="맑은 고딕"/>
+                        </a:rPr>
+                        <a:t>★5</a:t>
                       </a:r>
                     </a:p>
                   </a:txBody>
@@ -7724,13 +7780,36 @@
                     <a:p>
                       <a:pPr algn="ctr"/>
                       <a:r>
-                        <a:rPr sz="1250" b="0">
-                          <a:solidFill>
-                            <a:srgbClr val="262626"/>
-                          </a:solidFill>
-                          <a:latin typeface="맑은 고딕"/>
-                        </a:rPr>
-                        <a:t>★1 → ★2 (P6: 결함 0)</a:t>
+                        <a:rPr sz="1150" b="0">
+                          <a:solidFill>
+                            <a:srgbClr val="262626"/>
+                          </a:solidFill>
+                          <a:latin typeface="맑은 고딕"/>
+                        </a:rPr>
+                        <a:t>★1 (결함 11)</a:t>
+                      </a:r>
+                    </a:p>
+                  </a:txBody>
+                  <a:tcPr marL="50800" marR="50800" marT="12700" marB="12700" anchor="ctr">
+                    <a:solidFill>
+                      <a:srgbClr val="FFFFFF"/>
+                    </a:solidFill>
+                  </a:tcPr>
+                </a:tc>
+                <a:tc>
+                  <a:txBody>
+                    <a:bodyPr/>
+                    <a:lstStyle/>
+                    <a:p>
+                      <a:pPr algn="ctr"/>
+                      <a:r>
+                        <a:rPr sz="1150" b="1">
+                          <a:solidFill>
+                            <a:srgbClr val="262626"/>
+                          </a:solidFill>
+                          <a:latin typeface="맑은 고딕"/>
+                        </a:rPr>
+                        <a:t>★4 (결함 0)</a:t>
                       </a:r>
                     </a:p>
                   </a:txBody>
@@ -7749,7 +7828,7 @@
                     <a:p>
                       <a:pPr algn="ctr"/>
                       <a:r>
-                        <a:rPr sz="1250" b="0">
+                        <a:rPr sz="1150" b="0">
                           <a:solidFill>
                             <a:srgbClr val="262626"/>
                           </a:solidFill>
@@ -7772,7 +7851,7 @@
                     <a:p>
                       <a:pPr algn="ctr"/>
                       <a:r>
-                        <a:rPr sz="1250" b="0">
+                        <a:rPr sz="1150" b="0">
                           <a:solidFill>
                             <a:srgbClr val="262626"/>
                           </a:solidFill>
@@ -7795,7 +7874,30 @@
                     <a:p>
                       <a:pPr algn="ctr"/>
                       <a:r>
-                        <a:rPr sz="1250" b="1">
+                        <a:rPr sz="1150" b="1">
+                          <a:solidFill>
+                            <a:srgbClr val="262626"/>
+                          </a:solidFill>
+                          <a:latin typeface="맑은 고딕"/>
+                        </a:rPr>
+                        <a:t>★2</a:t>
+                      </a:r>
+                    </a:p>
+                  </a:txBody>
+                  <a:tcPr marL="50800" marR="50800" marT="12700" marB="12700" anchor="ctr">
+                    <a:solidFill>
+                      <a:srgbClr val="FFFFFF"/>
+                    </a:solidFill>
+                  </a:tcPr>
+                </a:tc>
+                <a:tc>
+                  <a:txBody>
+                    <a:bodyPr/>
+                    <a:lstStyle/>
+                    <a:p>
+                      <a:pPr algn="ctr"/>
+                      <a:r>
+                        <a:rPr sz="1150" b="1">
                           <a:solidFill>
                             <a:srgbClr val="262626"/>
                           </a:solidFill>
@@ -7820,7 +7922,7 @@
                     <a:p>
                       <a:pPr algn="ctr"/>
                       <a:r>
-                        <a:rPr sz="1250" b="0">
+                        <a:rPr sz="1150" b="0">
                           <a:solidFill>
                             <a:srgbClr val="262626"/>
                           </a:solidFill>
@@ -7843,7 +7945,7 @@
                     <a:p>
                       <a:pPr algn="ctr"/>
                       <a:r>
-                        <a:rPr sz="1250" b="0">
+                        <a:rPr sz="1150" b="0">
                           <a:solidFill>
                             <a:srgbClr val="262626"/>
                           </a:solidFill>
@@ -7866,7 +7968,30 @@
                     <a:p>
                       <a:pPr algn="ctr"/>
                       <a:r>
-                        <a:rPr sz="1250" b="0">
+                        <a:rPr sz="1150" b="0">
+                          <a:solidFill>
+                            <a:srgbClr val="262626"/>
+                          </a:solidFill>
+                          <a:latin typeface="맑은 고딕"/>
+                        </a:rPr>
+                        <a:t>★4 이상</a:t>
+                      </a:r>
+                    </a:p>
+                  </a:txBody>
+                  <a:tcPr marL="50800" marR="50800" marT="12700" marB="12700" anchor="ctr">
+                    <a:solidFill>
+                      <a:srgbClr val="FFFFFF"/>
+                    </a:solidFill>
+                  </a:tcPr>
+                </a:tc>
+                <a:tc>
+                  <a:txBody>
+                    <a:bodyPr/>
+                    <a:lstStyle/>
+                    <a:p>
+                      <a:pPr algn="ctr"/>
+                      <a:r>
+                        <a:rPr sz="1150" b="0">
                           <a:solidFill>
                             <a:srgbClr val="262626"/>
                           </a:solidFill>
@@ -7955,7 +8080,7 @@
                 </a:solidFill>
                 <a:latin typeface="맑은 고딕"/>
               </a:rPr>
-              <a:t>"기다렸다 최적을 고르는 설계(방안 2 계열)가 품질을 이기고, 그 대가(노출·메모리·꼬리 지연)는 택틱으로 통제 가능하다 — 두 DP 모두 실측 입증(2+·pool+P6)."</a:t>
+              <a:t>"기다렸다 최적을 고르는 설계(방안 2 계열)가 품질을 이기고, 그 대가는 택틱으로 통제 가능하다" — 두 DP 모두 실측으로 입증 (다자 = 방안 2+, 복합 = pool+P6)</a:t>
             </a:r>
           </a:p>
         </p:txBody>
@@ -8010,7 +8135,7 @@
                 </a:solidFill>
                 <a:latin typeface="맑은 고딕"/>
               </a:rPr>
-              <a:t>*구 4-10축 스윕의 관측 하한(상한 도달, censored) — 정식 재판정 후속 과제  ·  수치 출처: 60·62·63·66 (모든 값은 raw에서 재검산 가능)</a:t>
+              <a:t>*구 4-10축 스윕의 관측 하한(censored) — 정식 재판정 후속  ·  수치 출처: 60·62·63·66 (raw 재검산 가능)  ·  RU 사다리 = 2026-08-14 재개정 (★5 ≤1%)</a:t>
             </a:r>
           </a:p>
         </p:txBody>
@@ -10850,7 +10975,7 @@
                           </a:solidFill>
                           <a:latin typeface="맑은 고딕"/>
                         </a:rPr>
-                        <a:t>≤0.01%</a:t>
+                        <a:t>≤1%</a:t>
                       </a:r>
                     </a:p>
                   </a:txBody>
@@ -10873,7 +10998,7 @@
                           </a:solidFill>
                           <a:latin typeface="맑은 고딕"/>
                         </a:rPr>
-                        <a:t>≤0.1%</a:t>
+                        <a:t>≤3.2%</a:t>
                       </a:r>
                     </a:p>
                   </a:txBody>
@@ -10896,7 +11021,7 @@
                           </a:solidFill>
                           <a:latin typeface="맑은 고딕"/>
                         </a:rPr>
-                        <a:t>≤1%</a:t>
+                        <a:t>≤10%</a:t>
                       </a:r>
                     </a:p>
                   </a:txBody>
@@ -10919,7 +11044,7 @@
                           </a:solidFill>
                           <a:latin typeface="맑은 고딕"/>
                         </a:rPr>
-                        <a:t>≤10%</a:t>
+                        <a:t>≤32%</a:t>
                       </a:r>
                     </a:p>
                   </a:txBody>
@@ -11046,7 +11171,7 @@
                 </a:solidFill>
                 <a:latin typeface="맑은 고딕"/>
               </a:rPr>
-              <a:t>로그 사다리 — 1칸 = 10배 여유. 조합이 지수로 자라는 도메인에서 선형 등분은 변별력을 잃는다</a:t>
+              <a:t>[1%,100%] 로그 4등분 — ★5(≤1%) = 실사용 최대(≈10축)까지 성장(약 100배)해도 한도 내. 1칸 = √10 ≈ 3.2배</a:t>
             </a:r>
           </a:p>
         </p:txBody>

--- a/docs/changbae/65-QA-종합-임원보고.pptx
+++ b/docs/changbae/65-QA-종합-임원보고.pptx
@@ -1005,7 +1005,7 @@
           <a:lstStyle/>
           <a:p>
             <a:r>
-              <a:t>그림: 순위표 공개/비밀 개념 (drawio/61-4). 정본 24 §3.</a:t>
+              <a:t>그림: 순위표 노출 개념 (drawio/61-4). 정본 24 §3.</a:t>
             </a:r>
           </a:p>
         </p:txBody>
@@ -4929,7 +4929,7 @@
                           </a:solidFill>
                           <a:latin typeface="맑은 고딕"/>
                         </a:rPr>
-                        <a:t>잔여 비밀 52 → 92% (정확성·라운드 불변)</a:t>
+                        <a:t>노출 48 → 8% (정확성·라운드 불변)</a:t>
                       </a:r>
                     </a:p>
                   </a:txBody>
@@ -5123,7 +5123,7 @@
                           </a:solidFill>
                           <a:latin typeface="맑은 고딕"/>
                         </a:rPr>
-                        <a:t>기밀성</a:t>
+                        <a:t>기밀성 (노출률)</a:t>
                       </a:r>
                     </a:p>
                   </a:txBody>
@@ -5146,7 +5146,7 @@
                           </a:solidFill>
                           <a:latin typeface="맑은 고딕"/>
                         </a:rPr>
-                        <a:t>51.7% ★3</a:t>
+                        <a:t>48.3% ★3</a:t>
                       </a:r>
                     </a:p>
                   </a:txBody>
@@ -5169,7 +5169,7 @@
                           </a:solidFill>
                           <a:latin typeface="맑은 고딕"/>
                         </a:rPr>
-                        <a:t>92.1% ★5</a:t>
+                        <a:t>7.9% ★5</a:t>
                       </a:r>
                     </a:p>
                   </a:txBody>
@@ -8823,7 +8823,7 @@
                           </a:solidFill>
                           <a:latin typeface="맑은 고딕"/>
                         </a:rPr>
-                        <a:t>끝나도 내 선호가 얼마나 비밀로 남는가</a:t>
+                        <a:t>끝난 뒤 내 선호가 얼마나 노출되는가</a:t>
                       </a:r>
                     </a:p>
                   </a:txBody>
@@ -8846,7 +8846,7 @@
                           </a:solidFill>
                           <a:latin typeface="맑은 고딕"/>
                         </a:rPr>
-                        <a:t>잔여 비밀률 (평균)</a:t>
+                        <a:t>후보안 노출률 (평균)</a:t>
                       </a:r>
                     </a:p>
                   </a:txBody>
@@ -11193,7 +11193,7 @@
         <p:spPr>
           <a:xfrm>
             <a:off x="457200" y="4864608"/>
-            <a:ext cx="4082587" cy="1828800"/>
+            <a:ext cx="4084414" cy="1828800"/>
           </a:xfrm>
           <a:prstGeom prst="rect">
             <a:avLst/>
@@ -11345,7 +11345,7 @@
                 </a:solidFill>
                 <a:latin typeface="맑은 고딕"/>
               </a:rPr>
-              <a:t>협상이 끝난 뒤에도 내 선호(전체 후보 서열)가 얼마나 비밀로 남는가 — 잔여 비밀률</a:t>
+              <a:t>협상이 끝난 뒤에 내 선호(전체 후보 서열)가 얼마나 노출되는가 — 후보안 노출률 (낮을수록 좋음)</a:t>
             </a:r>
           </a:p>
         </p:txBody>
@@ -11736,7 +11736,7 @@
                           </a:solidFill>
                           <a:latin typeface="맑은 고딕"/>
                         </a:rPr>
-                        <a:t>&gt;80%</a:t>
+                        <a:t>≤20%</a:t>
                       </a:r>
                     </a:p>
                   </a:txBody>
@@ -11759,7 +11759,7 @@
                           </a:solidFill>
                           <a:latin typeface="맑은 고딕"/>
                         </a:rPr>
-                        <a:t>&gt;60%</a:t>
+                        <a:t>≤40%</a:t>
                       </a:r>
                     </a:p>
                   </a:txBody>
@@ -11782,7 +11782,7 @@
                           </a:solidFill>
                           <a:latin typeface="맑은 고딕"/>
                         </a:rPr>
-                        <a:t>&gt;40%</a:t>
+                        <a:t>≤60%</a:t>
                       </a:r>
                     </a:p>
                   </a:txBody>
@@ -11805,7 +11805,7 @@
                           </a:solidFill>
                           <a:latin typeface="맑은 고딕"/>
                         </a:rPr>
-                        <a:t>&gt;20%</a:t>
+                        <a:t>≤80%</a:t>
                       </a:r>
                     </a:p>
                   </a:txBody>
@@ -11828,7 +11828,7 @@
                           </a:solidFill>
                           <a:latin typeface="맑은 고딕"/>
                         </a:rPr>
-                        <a:t>&gt;0%</a:t>
+                        <a:t>&lt;100%</a:t>
                       </a:r>
                     </a:p>
                   </a:txBody>
@@ -11851,7 +11851,7 @@
                           </a:solidFill>
                           <a:latin typeface="맑은 고딕"/>
                         </a:rPr>
-                        <a:t>0%</a:t>
+                        <a:t>100%</a:t>
                       </a:r>
                     </a:p>
                   </a:txBody>
@@ -11932,7 +11932,7 @@
                 </a:solidFill>
                 <a:latin typeface="맑은 고딕"/>
               </a:rPr>
-              <a:t>무노출 100% - 전량 공개 0% 사이 20%p 등분</a:t>
+              <a:t>무노출 0% - 전량 공개 100% 사이 20%p 등분 (경계 포함 — TB·RU와 동일 규약)</a:t>
             </a:r>
           </a:p>
           <a:p>
@@ -11964,7 +11964,7 @@
                 </a:solidFill>
                 <a:latin typeface="맑은 고딕"/>
               </a:rPr>
-              <a:t>1:1 협상의 실측 잔여 ≈ 71% → "★4 이상 = 일반 2인 협상 수준으로 지킨다"</a:t>
+              <a:t>1:1 협상의 실측 노출 ≈ 29% → "★4 이상 = 일반 2인 협상 수준으로 지킨다"</a:t>
             </a:r>
           </a:p>
         </p:txBody>
@@ -11986,7 +11986,7 @@
         <p:spPr>
           <a:xfrm>
             <a:off x="457200" y="4864608"/>
-            <a:ext cx="3241884" cy="1828800"/>
+            <a:ext cx="3238591" cy="1828800"/>
           </a:xfrm>
           <a:prstGeom prst="rect">
             <a:avLst/>
@@ -13996,7 +13996,7 @@
                           </a:solidFill>
                           <a:latin typeface="맑은 고딕"/>
                         </a:rPr>
-                        <a:t>기밀성 (잔여 비밀률)</a:t>
+                        <a:t>기밀성 (노출률 — 낮을수록 좋음)</a:t>
                       </a:r>
                     </a:p>
                   </a:txBody>
@@ -14019,7 +14019,7 @@
                           </a:solidFill>
                           <a:latin typeface="맑은 고딕"/>
                         </a:rPr>
-                        <a:t>68.3% ★4</a:t>
+                        <a:t>31.7% ★4</a:t>
                       </a:r>
                     </a:p>
                   </a:txBody>
@@ -14042,7 +14042,7 @@
                           </a:solidFill>
                           <a:latin typeface="맑은 고딕"/>
                         </a:rPr>
-                        <a:t>51.7% ★3</a:t>
+                        <a:t>48.3% ★3</a:t>
                       </a:r>
                     </a:p>
                   </a:txBody>
@@ -14907,7 +14907,7 @@
                 </a:solidFill>
                 <a:latin typeface="맑은 고딕"/>
               </a:rPr>
-              <a:t>1-A는 전 구간 1:1 협상 수준(71%) 근방을 지키고, 방안 2는 합의 후보가 깊은 판에서 30%까지 하락</a:t>
+              <a:t>1-A는 전 구간 1:1 협상 수준(노출 29%) 근방을 지키고, 방안 2는 합의 후보가 깊은 판에서 노출 70%까지 상승</a:t>
             </a:r>
           </a:p>
           <a:p>

--- a/docs/changbae/65-QA-종합-임원보고.pptx
+++ b/docs/changbae/65-QA-종합-임원보고.pptx
@@ -935,7 +935,7 @@
           <a:lstStyle/>
           <a:p>
             <a:r>
-              <a:t>그림: 한도 유도 개념 (drawio/61-3). 정본 24 §2 (2026-08-13 개정: P95·로그 사다리).</a:t>
+              <a:t>그림: 한도 유도 개념 (drawio/61-3). 정본 24 §2 (2026-08-14 재개정: 판정 최대값·[1%,100%] 로그 사다리).</a:t>
             </a:r>
           </a:p>
         </p:txBody>
@@ -5846,7 +5846,7 @@
                           </a:solidFill>
                           <a:latin typeface="맑은 고딕"/>
                         </a:rPr>
-                        <a:t>자원-메모리 (r P95)</a:t>
+                        <a:t>자원-메모리 (r 최대)</a:t>
                       </a:r>
                     </a:p>
                   </a:txBody>
@@ -5869,7 +5869,7 @@
                           </a:solidFill>
                           <a:latin typeface="맑은 고딕"/>
                         </a:rPr>
-                        <a:t>0.30% ★5</a:t>
+                        <a:t>0.96% ★5</a:t>
                       </a:r>
                     </a:p>
                   </a:txBody>
@@ -5892,7 +5892,7 @@
                           </a:solidFill>
                           <a:latin typeface="맑은 고딕"/>
                         </a:rPr>
-                        <a:t>48.2% ★1 (한도 초과 11건)</a:t>
+                        <a:t>3,692% ★0 (한도 초과 11건)</a:t>
                       </a:r>
                     </a:p>
                   </a:txBody>
@@ -6741,7 +6741,7 @@
                 </a:solidFill>
                 <a:latin typeface="맑은 고딕"/>
               </a:rPr>
-              <a:t>P95 0.39MB · 최악 1.2MB — 전 구간 한도의 1% 미만으로 평평 (축값 목록만 유지)</a:t>
+              <a:t>최악 1.2MB · P95 0.39MB — 전 구간 한도의 1% 미만으로 평평 (축값 목록만 유지)</a:t>
             </a:r>
           </a:p>
           <a:p>
@@ -6791,7 +6791,7 @@
                 </a:solidFill>
                 <a:latin typeface="맑은 고딕"/>
               </a:rPr>
-              <a:t>축마다 같은 개수로 풀을 만들던 것을 "중요한 축에 몰아주고 예산을 지키는" 배분으로 교체 — FIN 500건 재측정: r P95 48.2% → 1.32% (37배, ★1→★4) · 최악 4.0% · 한도 초과 11 → 0건 · 비용은 정확성 −0.002·시간 +0.010 (등급 불변)</a:t>
+              <a:t>축마다 같은 개수로 풀을 만들던 것을 "중요한 축에 몰아주고 예산을 지키는" 배분으로 교체 — FIN 500건 재측정: r 최대 3,692% → 4.0% (923배, ★0→★3) · P95 48.2% → 1.32% · 한도 초과 11 → 0건 · 비용은 정확성 −0.002·시간 +0.010 (등급 불변)</a:t>
             </a:r>
           </a:p>
           <a:p>
@@ -6816,7 +6816,7 @@
                 </a:solidFill>
                 <a:latin typeface="맑은 고딕"/>
               </a:rPr>
-              <a:t>pool + P6 — 16축 조건의 메모리 근거 소멸(20축까지 초과 0건). 잔여 과제는 P95 1.32%의 ★5 경계(≤1%) 직상뿐 (예산 상한 스윕 후속)</a:t>
+              <a:t>pool + P6 — 16축 조건의 메모리 근거 소멸(20축까지 초과 0건). 잔여 과제는 판정 r 최대 4.0%의 ★4 경계(≤3.2%) 직상뿐 (예산 상한 스윕 후속 — 현재 ★3)</a:t>
             </a:r>
           </a:p>
         </p:txBody>
@@ -7740,7 +7740,7 @@
                           </a:solidFill>
                           <a:latin typeface="맑은 고딕"/>
                         </a:rPr>
-                        <a:t>자원 (P95)</a:t>
+                        <a:t>자원 (최대)</a:t>
                       </a:r>
                     </a:p>
                   </a:txBody>
@@ -7786,7 +7786,7 @@
                           </a:solidFill>
                           <a:latin typeface="맑은 고딕"/>
                         </a:rPr>
-                        <a:t>★1 (결함 11)</a:t>
+                        <a:t>★0 (결함 11)</a:t>
                       </a:r>
                     </a:p>
                   </a:txBody>
@@ -7809,7 +7809,7 @@
                           </a:solidFill>
                           <a:latin typeface="맑은 고딕"/>
                         </a:rPr>
-                        <a:t>★4 (결함 0)</a:t>
+                        <a:t>★3 (결함 0)</a:t>
                       </a:r>
                     </a:p>
                   </a:txBody>
@@ -8683,7 +8683,7 @@
                           </a:solidFill>
                           <a:latin typeface="맑은 고딕"/>
                         </a:rPr>
-                        <a:t>사용률 r (P95)</a:t>
+                        <a:t>사용률 r (최대값)</a:t>
                       </a:r>
                     </a:p>
                   </a:txBody>
@@ -10719,7 +10719,7 @@
                 </a:solidFill>
                 <a:latin typeface="맑은 고딕"/>
               </a:rPr>
-              <a:t>판정 = 케이스 P95 (OOM은 꼬리 사건)</a:t>
+              <a:t>판정 = 케이스 최대값 (OOM은 최악 1건이 크리티컬 — P95·중앙 병기. 시간 ρ는 체감 품질이라 P95 유지)</a:t>
             </a:r>
           </a:p>
           <a:p>

--- a/docs/changbae/65-QA-종합-임원보고.pptx
+++ b/docs/changbae/65-QA-종합-임원보고.pptx
@@ -935,7 +935,7 @@
           <a:lstStyle/>
           <a:p>
             <a:r>
-              <a:t>그림: 한도 유도 개념 (drawio/61-3). 정본 24 §2 (2026-08-14 재개정: 판정 최대값·[1%,100%] 로그 사다리).</a:t>
+              <a:t>그림: 한도 유도 개념 (drawio/61-3). 정본 24 §2 (2026-08-14 3차: P95·최대 병행·[1%,100%] 로그 사다리).</a:t>
             </a:r>
           </a:p>
         </p:txBody>
@@ -5630,7 +5630,7 @@
         </p:nvGraphicFramePr>
         <p:xfrm>
           <a:off x="411480" y="2834640"/>
-          <a:ext cx="11384280" cy="1901952"/>
+          <a:ext cx="11384280" cy="2377440"/>
         </p:xfrm>
         <a:graphic>
           <a:graphicData uri="http://schemas.openxmlformats.org/drawingml/2006/table">
@@ -5846,7 +5846,101 @@
                           </a:solidFill>
                           <a:latin typeface="맑은 고딕"/>
                         </a:rPr>
-                        <a:t>자원-메모리 (r 최대)</a:t>
+                        <a:t>자원-메모리 ① r P95</a:t>
+                      </a:r>
+                    </a:p>
+                  </a:txBody>
+                  <a:tcPr marL="50800" marR="50800" marT="12700" marB="12700" anchor="ctr">
+                    <a:solidFill>
+                      <a:srgbClr val="FFFFFF"/>
+                    </a:solidFill>
+                  </a:tcPr>
+                </a:tc>
+                <a:tc>
+                  <a:txBody>
+                    <a:bodyPr/>
+                    <a:lstStyle/>
+                    <a:p>
+                      <a:pPr algn="ctr"/>
+                      <a:r>
+                        <a:rPr sz="1200" b="1">
+                          <a:solidFill>
+                            <a:srgbClr val="262626"/>
+                          </a:solidFill>
+                          <a:latin typeface="맑은 고딕"/>
+                        </a:rPr>
+                        <a:t>0.30% ★5</a:t>
+                      </a:r>
+                    </a:p>
+                  </a:txBody>
+                  <a:tcPr marL="50800" marR="50800" marT="12700" marB="12700" anchor="ctr">
+                    <a:solidFill>
+                      <a:srgbClr val="FFFFFF"/>
+                    </a:solidFill>
+                  </a:tcPr>
+                </a:tc>
+                <a:tc>
+                  <a:txBody>
+                    <a:bodyPr/>
+                    <a:lstStyle/>
+                    <a:p>
+                      <a:pPr algn="ctr"/>
+                      <a:r>
+                        <a:rPr sz="1200" b="0">
+                          <a:solidFill>
+                            <a:srgbClr val="262626"/>
+                          </a:solidFill>
+                          <a:latin typeface="맑은 고딕"/>
+                        </a:rPr>
+                        <a:t>48.2% ★1</a:t>
+                      </a:r>
+                    </a:p>
+                  </a:txBody>
+                  <a:tcPr marL="50800" marR="50800" marT="12700" marB="12700" anchor="ctr">
+                    <a:solidFill>
+                      <a:srgbClr val="FFFFFF"/>
+                    </a:solidFill>
+                  </a:tcPr>
+                </a:tc>
+                <a:tc>
+                  <a:txBody>
+                    <a:bodyPr/>
+                    <a:lstStyle/>
+                    <a:p>
+                      <a:pPr algn="ctr"/>
+                      <a:r>
+                        <a:rPr sz="1200" b="0">
+                          <a:solidFill>
+                            <a:srgbClr val="262626"/>
+                          </a:solidFill>
+                          <a:latin typeface="맑은 고딕"/>
+                        </a:rPr>
+                        <a:t>seq2</a:t>
+                      </a:r>
+                    </a:p>
+                  </a:txBody>
+                  <a:tcPr marL="50800" marR="50800" marT="12700" marB="12700" anchor="ctr">
+                    <a:solidFill>
+                      <a:srgbClr val="FFFFFF"/>
+                    </a:solidFill>
+                  </a:tcPr>
+                </a:tc>
+              </a:tr>
+              <a:tr h="475488">
+                <a:tc>
+                  <a:txBody>
+                    <a:bodyPr/>
+                    <a:lstStyle/>
+                    <a:p>
+                      <a:pPr algn="ctr"/>
+                      <a:r>
+                        <a:rPr sz="1200" b="0">
+                          <a:solidFill>
+                            <a:srgbClr val="262626"/>
+                          </a:solidFill>
+                          <a:latin typeface="맑은 고딕"/>
+                        </a:rPr>
+                        <a:t>자원-메모리 ② r 최대</a:t>
                       </a:r>
                     </a:p>
                   </a:txBody>
@@ -6791,7 +6885,7 @@
                 </a:solidFill>
                 <a:latin typeface="맑은 고딕"/>
               </a:rPr>
-              <a:t>축마다 같은 개수로 풀을 만들던 것을 "중요한 축에 몰아주고 예산을 지키는" 배분으로 교체 — FIN 500건 재측정: r 최대 3,692% → 4.0% (923배, ★0→★3) · P95 48.2% → 1.32% · 한도 초과 11 → 0건 · 비용은 정확성 −0.002·시간 +0.010 (등급 불변)</a:t>
+              <a:t>축마다 같은 개수로 풀을 만들던 것을 "중요한 축에 몰아주고 예산을 지키는" 배분으로 교체 — FIN 500건 재측정: r P95 48.2% → 1.32% (37배, ★1→★4) · 최대 3,692% → 4.0% (923배, ★0→★3) · 한도 초과 11 → 0건 · 비용은 정확성 −0.002·시간 +0.010 (등급 불변)</a:t>
             </a:r>
           </a:p>
           <a:p>
@@ -6816,7 +6910,7 @@
                 </a:solidFill>
                 <a:latin typeface="맑은 고딕"/>
               </a:rPr>
-              <a:t>pool + P6 — 16축 조건의 메모리 근거 소멸(20축까지 초과 0건). 잔여 과제는 판정 r 최대 4.0%의 ★4 경계(≤3.2%) 직상뿐 (예산 상한 스윕 후속 — 현재 ★3)</a:t>
+              <a:t>pool + P6 — 16축 조건의 메모리 근거 소멸(20축까지 초과 0건). 잔여 과제는 두 케이스 모두 경계 직상뿐 — P95 1.32%(★5 경계)·최대 4.0%(★4 경계). 예산 상한 스윕 후속</a:t>
             </a:r>
           </a:p>
         </p:txBody>
@@ -7524,7 +7618,7 @@
         </p:nvGraphicFramePr>
         <p:xfrm>
           <a:off x="6400800" y="1508760"/>
-          <a:ext cx="5394960" cy="2377440"/>
+          <a:ext cx="5394960" cy="2852928"/>
         </p:xfrm>
         <a:graphic>
           <a:graphicData uri="http://schemas.openxmlformats.org/drawingml/2006/table">
@@ -7740,7 +7834,101 @@
                           </a:solidFill>
                           <a:latin typeface="맑은 고딕"/>
                         </a:rPr>
-                        <a:t>자원 (최대)</a:t>
+                        <a:t>자원 ① P95</a:t>
+                      </a:r>
+                    </a:p>
+                  </a:txBody>
+                  <a:tcPr marL="50800" marR="50800" marT="12700" marB="12700" anchor="ctr">
+                    <a:solidFill>
+                      <a:srgbClr val="FFFFFF"/>
+                    </a:solidFill>
+                  </a:tcPr>
+                </a:tc>
+                <a:tc>
+                  <a:txBody>
+                    <a:bodyPr/>
+                    <a:lstStyle/>
+                    <a:p>
+                      <a:pPr algn="ctr"/>
+                      <a:r>
+                        <a:rPr sz="1150" b="1">
+                          <a:solidFill>
+                            <a:srgbClr val="262626"/>
+                          </a:solidFill>
+                          <a:latin typeface="맑은 고딕"/>
+                        </a:rPr>
+                        <a:t>★5</a:t>
+                      </a:r>
+                    </a:p>
+                  </a:txBody>
+                  <a:tcPr marL="50800" marR="50800" marT="12700" marB="12700" anchor="ctr">
+                    <a:solidFill>
+                      <a:srgbClr val="FFFFFF"/>
+                    </a:solidFill>
+                  </a:tcPr>
+                </a:tc>
+                <a:tc>
+                  <a:txBody>
+                    <a:bodyPr/>
+                    <a:lstStyle/>
+                    <a:p>
+                      <a:pPr algn="ctr"/>
+                      <a:r>
+                        <a:rPr sz="1150" b="0">
+                          <a:solidFill>
+                            <a:srgbClr val="262626"/>
+                          </a:solidFill>
+                          <a:latin typeface="맑은 고딕"/>
+                        </a:rPr>
+                        <a:t>★1 (결함 11)</a:t>
+                      </a:r>
+                    </a:p>
+                  </a:txBody>
+                  <a:tcPr marL="50800" marR="50800" marT="12700" marB="12700" anchor="ctr">
+                    <a:solidFill>
+                      <a:srgbClr val="FFFFFF"/>
+                    </a:solidFill>
+                  </a:tcPr>
+                </a:tc>
+                <a:tc>
+                  <a:txBody>
+                    <a:bodyPr/>
+                    <a:lstStyle/>
+                    <a:p>
+                      <a:pPr algn="ctr"/>
+                      <a:r>
+                        <a:rPr sz="1150" b="1">
+                          <a:solidFill>
+                            <a:srgbClr val="262626"/>
+                          </a:solidFill>
+                          <a:latin typeface="맑은 고딕"/>
+                        </a:rPr>
+                        <a:t>★4 (결함 0)</a:t>
+                      </a:r>
+                    </a:p>
+                  </a:txBody>
+                  <a:tcPr marL="50800" marR="50800" marT="12700" marB="12700" anchor="ctr">
+                    <a:solidFill>
+                      <a:srgbClr val="FFFFFF"/>
+                    </a:solidFill>
+                  </a:tcPr>
+                </a:tc>
+              </a:tr>
+              <a:tr h="475488">
+                <a:tc>
+                  <a:txBody>
+                    <a:bodyPr/>
+                    <a:lstStyle/>
+                    <a:p>
+                      <a:pPr algn="ctr"/>
+                      <a:r>
+                        <a:rPr sz="1150" b="0">
+                          <a:solidFill>
+                            <a:srgbClr val="262626"/>
+                          </a:solidFill>
+                          <a:latin typeface="맑은 고딕"/>
+                        </a:rPr>
+                        <a:t>자원 ② 최대</a:t>
                       </a:r>
                     </a:p>
                   </a:txBody>
@@ -8683,7 +8871,7 @@
                           </a:solidFill>
                           <a:latin typeface="맑은 고딕"/>
                         </a:rPr>
-                        <a:t>사용률 r (최대값)</a:t>
+                        <a:t>사용률 r (P95·최대 병행)</a:t>
                       </a:r>
                     </a:p>
                   </a:txBody>
@@ -10719,7 +10907,7 @@
                 </a:solidFill>
                 <a:latin typeface="맑은 고딕"/>
               </a:rPr>
-              <a:t>판정 = 케이스 최대값 (OOM은 최악 1건이 크리티컬 — P95·중앙 병기. 시간 ρ는 체감 품질이라 P95 유지)</a:t>
+              <a:t>별점 = P95·최대 2케이스 병행 — ① P95 = 95% 보장 여유 ② 최대 = 최악 안전 (OOM 크리티컬 — 단일 인용 대표. 시간 ρ는 P95 단일)</a:t>
             </a:r>
           </a:p>
           <a:p>

--- a/docs/changbae/65-QA-종합-임원보고.pptx
+++ b/docs/changbae/65-QA-종합-임원보고.pptx
@@ -935,7 +935,7 @@
           <a:lstStyle/>
           <a:p>
             <a:r>
-              <a:t>그림: 한도 유도 개념 (drawio/61-3). 정본 24 §2 (2026-08-14 3차: P95·최대 병행·[1%,100%] 로그 사다리).</a:t>
+              <a:t>그림: 한도 유도 개념 (drawio/61-3). 정본 24 §2 (2026-08-14 확정: P95·최대 병행 · 20%p 사다리).</a:t>
             </a:r>
           </a:p>
         </p:txBody>
@@ -5892,7 +5892,7 @@
                           </a:solidFill>
                           <a:latin typeface="맑은 고딕"/>
                         </a:rPr>
-                        <a:t>48.2% ★1</a:t>
+                        <a:t>48.2% ★3</a:t>
                       </a:r>
                     </a:p>
                   </a:txBody>
@@ -6885,7 +6885,7 @@
                 </a:solidFill>
                 <a:latin typeface="맑은 고딕"/>
               </a:rPr>
-              <a:t>축마다 같은 개수로 풀을 만들던 것을 "중요한 축에 몰아주고 예산을 지키는" 배분으로 교체 — FIN 500건 재측정: r P95 48.2% → 1.32% (37배, ★1→★4) · 최대 3,692% → 4.0% (923배, ★0→★3) · 한도 초과 11 → 0건 · 비용은 정확성 −0.002·시간 +0.010 (등급 불변)</a:t>
+              <a:t>축마다 같은 개수로 풀을 만들던 것을 "중요한 축에 몰아주고 예산을 지키는" 배분으로 교체 — FIN 500건 재측정: r P95 48.2% → 1.32% (37배, ★3→★5) · 최대 3,692% → 4.0% (923배, ★0→★5) · 한도 초과 11 → 0건 · 비용은 정확성 −0.002·시간 +0.010 (등급 불변)</a:t>
             </a:r>
           </a:p>
           <a:p>
@@ -6910,7 +6910,7 @@
                 </a:solidFill>
                 <a:latin typeface="맑은 고딕"/>
               </a:rPr>
-              <a:t>pool + P6 — 16축 조건의 메모리 근거 소멸(20축까지 초과 0건). 잔여 과제는 두 케이스 모두 경계 직상뿐 — P95 1.32%(★5 경계)·최대 4.0%(★4 경계). 예산 상한 스윕 후속</a:t>
+              <a:t>pool + P6 — 16축 조건의 메모리 근거 소멸(20축까지 초과 0건), 두 케이스 모두 ★5 (예산 상한 스윕은 원값을 더 낮추는 선택 과제)</a:t>
             </a:r>
           </a:p>
         </p:txBody>
@@ -7880,7 +7880,7 @@
                           </a:solidFill>
                           <a:latin typeface="맑은 고딕"/>
                         </a:rPr>
-                        <a:t>★1 (결함 11)</a:t>
+                        <a:t>★3 (결함 11)</a:t>
                       </a:r>
                     </a:p>
                   </a:txBody>
@@ -7903,7 +7903,7 @@
                           </a:solidFill>
                           <a:latin typeface="맑은 고딕"/>
                         </a:rPr>
-                        <a:t>★4 (결함 0)</a:t>
+                        <a:t>★5 (결함 0)</a:t>
                       </a:r>
                     </a:p>
                   </a:txBody>
@@ -7997,7 +7997,7 @@
                           </a:solidFill>
                           <a:latin typeface="맑은 고딕"/>
                         </a:rPr>
-                        <a:t>★3 (결함 0)</a:t>
+                        <a:t>★5 (결함 0)</a:t>
                       </a:r>
                     </a:p>
                   </a:txBody>
@@ -8323,7 +8323,7 @@
                 </a:solidFill>
                 <a:latin typeface="맑은 고딕"/>
               </a:rPr>
-              <a:t>*구 4-10축 스윕의 관측 하한(censored) — 정식 재판정 후속  ·  수치 출처: 60·62·63·66 (raw 재검산 가능)  ·  RU 사다리 = 2026-08-14 재개정 (★5 ≤1%)</a:t>
+              <a:t>*구 4-10축 스윕의 관측 하한(censored) — 정식 재판정 후속  ·  수치 출처: 60·62·63·66 (raw 재검산 가능)  ·  RU 사다리 = 2026-08-14 확정 20%p 등분 (★5 ≤20%)</a:t>
             </a:r>
           </a:p>
         </p:txBody>
@@ -11163,7 +11163,7 @@
                           </a:solidFill>
                           <a:latin typeface="맑은 고딕"/>
                         </a:rPr>
-                        <a:t>≤1%</a:t>
+                        <a:t>≤20%</a:t>
                       </a:r>
                     </a:p>
                   </a:txBody>
@@ -11186,7 +11186,7 @@
                           </a:solidFill>
                           <a:latin typeface="맑은 고딕"/>
                         </a:rPr>
-                        <a:t>≤3.2%</a:t>
+                        <a:t>≤40%</a:t>
                       </a:r>
                     </a:p>
                   </a:txBody>
@@ -11209,7 +11209,7 @@
                           </a:solidFill>
                           <a:latin typeface="맑은 고딕"/>
                         </a:rPr>
-                        <a:t>≤10%</a:t>
+                        <a:t>≤60%</a:t>
                       </a:r>
                     </a:p>
                   </a:txBody>
@@ -11232,7 +11232,7 @@
                           </a:solidFill>
                           <a:latin typeface="맑은 고딕"/>
                         </a:rPr>
-                        <a:t>≤32%</a:t>
+                        <a:t>≤80%</a:t>
                       </a:r>
                     </a:p>
                   </a:txBody>
@@ -11359,7 +11359,7 @@
                 </a:solidFill>
                 <a:latin typeface="맑은 고딕"/>
               </a:rPr>
-              <a:t>[1%,100%] 로그 4등분 — ★5(≤1%) = 실사용 최대(≈10축)까지 성장(약 100배)해도 한도 내. 1칸 = √10 ≈ 3.2배</a:t>
+              <a:t>20%p 등분 — 시간·기밀성 사다리와 동일 눈금 (2026-08-14 PL 확정). 저사용 구간 변별은 원값 r% 병기로</a:t>
             </a:r>
           </a:p>
         </p:txBody>

--- a/docs/changbae/65-QA-종합-임원보고.pptx
+++ b/docs/changbae/65-QA-종합-임원보고.pptx
@@ -5146,7 +5146,7 @@
                           </a:solidFill>
                           <a:latin typeface="맑은 고딕"/>
                         </a:rPr>
-                        <a:t>48.3% ★3</a:t>
+                        <a:t>48.3% ★2</a:t>
                       </a:r>
                     </a:p>
                   </a:txBody>
@@ -7398,7 +7398,7 @@
                           </a:solidFill>
                           <a:latin typeface="맑은 고딕"/>
                         </a:rPr>
-                        <a:t>★4</a:t>
+                        <a:t>★3</a:t>
                       </a:r>
                     </a:p>
                   </a:txBody>
@@ -7421,7 +7421,7 @@
                           </a:solidFill>
                           <a:latin typeface="맑은 고딕"/>
                         </a:rPr>
-                        <a:t>★3</a:t>
+                        <a:t>★2</a:t>
                       </a:r>
                     </a:p>
                   </a:txBody>
@@ -11359,7 +11359,7 @@
                 </a:solidFill>
                 <a:latin typeface="맑은 고딕"/>
               </a:rPr>
-              <a:t>20%p 등분 — 시간·기밀성 사다리와 동일 눈금 (2026-08-14 PL 확정). 저사용 구간 변별은 원값 r% 병기로</a:t>
+              <a:t>20%p 등분 — 시간 사다리와 동일 눈금 (기밀성은 실측 앵커 등분, 3차). 저사용 구간 변별은 원값 r% 병기로</a:t>
             </a:r>
           </a:p>
         </p:txBody>
@@ -11924,7 +11924,7 @@
                           </a:solidFill>
                           <a:latin typeface="맑은 고딕"/>
                         </a:rPr>
-                        <a:t>≤20%</a:t>
+                        <a:t>≤12%</a:t>
                       </a:r>
                     </a:p>
                   </a:txBody>
@@ -11947,7 +11947,7 @@
                           </a:solidFill>
                           <a:latin typeface="맑은 고딕"/>
                         </a:rPr>
-                        <a:t>≤40%</a:t>
+                        <a:t>≤30%</a:t>
                       </a:r>
                     </a:p>
                   </a:txBody>
@@ -11970,7 +11970,7 @@
                           </a:solidFill>
                           <a:latin typeface="맑은 고딕"/>
                         </a:rPr>
-                        <a:t>≤60%</a:t>
+                        <a:t>≤48%</a:t>
                       </a:r>
                     </a:p>
                   </a:txBody>
@@ -11993,7 +11993,7 @@
                           </a:solidFill>
                           <a:latin typeface="맑은 고딕"/>
                         </a:rPr>
-                        <a:t>≤80%</a:t>
+                        <a:t>≤66%</a:t>
                       </a:r>
                     </a:p>
                   </a:txBody>
@@ -12016,7 +12016,7 @@
                           </a:solidFill>
                           <a:latin typeface="맑은 고딕"/>
                         </a:rPr>
-                        <a:t>&lt;100%</a:t>
+                        <a:t>≤84%</a:t>
                       </a:r>
                     </a:p>
                   </a:txBody>
@@ -12039,7 +12039,7 @@
                           </a:solidFill>
                           <a:latin typeface="맑은 고딕"/>
                         </a:rPr>
-                        <a:t>100%</a:t>
+                        <a:t>&gt;84%</a:t>
                       </a:r>
                     </a:p>
                   </a:txBody>
@@ -12120,7 +12120,7 @@
                 </a:solidFill>
                 <a:latin typeface="맑은 고딕"/>
               </a:rPr>
-              <a:t>무노출 0% - 전량 공개 100% 사이 20%p 등분 (경계 포함 — TB·RU와 동일 규약)</a:t>
+              <a:t>실측 앵커 등분 (3차 개정): naive SAOP 실측 66% = ★2 · 1:1 실측 30% = ★4, 18%p 등간격 (경계 포함 ≤)</a:t>
             </a:r>
           </a:p>
           <a:p>
@@ -12152,7 +12152,7 @@
                 </a:solidFill>
                 <a:latin typeface="맑은 고딕"/>
               </a:rPr>
-              <a:t>1:1 협상의 실측 노출 ≈ 29% → "★4 이상 = 일반 2인 협상 수준으로 지킨다"</a:t>
+              <a:t>★4 이상 = 1:1 협상(실측 30%) 수준 · ★2 이하 = naive(실측 66%)와 다를 바 없음</a:t>
             </a:r>
           </a:p>
         </p:txBody>
@@ -14207,7 +14207,7 @@
                           </a:solidFill>
                           <a:latin typeface="맑은 고딕"/>
                         </a:rPr>
-                        <a:t>31.7% ★4</a:t>
+                        <a:t>31.7% ★3</a:t>
                       </a:r>
                     </a:p>
                   </a:txBody>
@@ -14230,7 +14230,7 @@
                           </a:solidFill>
                           <a:latin typeface="맑은 고딕"/>
                         </a:rPr>
-                        <a:t>48.3% ★3</a:t>
+                        <a:t>48.3% ★2</a:t>
                       </a:r>
                     </a:p>
                   </a:txBody>

--- a/docs/changbae/65-QA-종합-임원보고.pptx
+++ b/docs/changbae/65-QA-종합-임원보고.pptx
@@ -935,7 +935,7 @@
           <a:lstStyle/>
           <a:p>
             <a:r>
-              <a:t>그림: 한도 유도 개념 (drawio/61-3). 정본 24 §2 (2026-08-14 확정: P95·최대 병행 · 20%p 사다리).</a:t>
+              <a:t>그림: 한도 유도 개념 (drawio/61-3). 정본 24 §2 (2026-08-14 최종: P95·최대 병행 · 로그 사다리).</a:t>
             </a:r>
           </a:p>
         </p:txBody>
@@ -5146,7 +5146,7 @@
                           </a:solidFill>
                           <a:latin typeface="맑은 고딕"/>
                         </a:rPr>
-                        <a:t>48.3% ★2</a:t>
+                        <a:t>48.3% ★3</a:t>
                       </a:r>
                     </a:p>
                   </a:txBody>
@@ -5892,7 +5892,7 @@
                           </a:solidFill>
                           <a:latin typeface="맑은 고딕"/>
                         </a:rPr>
-                        <a:t>48.2% ★3</a:t>
+                        <a:t>48.2% ★1</a:t>
                       </a:r>
                     </a:p>
                   </a:txBody>
@@ -6885,7 +6885,7 @@
                 </a:solidFill>
                 <a:latin typeface="맑은 고딕"/>
               </a:rPr>
-              <a:t>축마다 같은 개수로 풀을 만들던 것을 "중요한 축에 몰아주고 예산을 지키는" 배분으로 교체 — FIN 500건 재측정: r P95 48.2% → 1.32% (37배, ★3→★5) · 최대 3,692% → 4.0% (923배, ★0→★5) · 한도 초과 11 → 0건 · 비용은 정확성 −0.002·시간 +0.010 (등급 불변)</a:t>
+              <a:t>축마다 같은 개수로 풀을 만들던 것을 "중요한 축에 몰아주고 예산을 지키는" 배분으로 교체 — FIN 500건 재측정: r P95 48.2% → 1.32% (37배, ★1→★4) · 최대 3,692% → 4.0% (923배, ★0→★3) · 한도 초과 11 → 0건 · 비용은 정확성 −0.002·시간 +0.010 (등급 불변)</a:t>
             </a:r>
           </a:p>
           <a:p>
@@ -6910,7 +6910,7 @@
                 </a:solidFill>
                 <a:latin typeface="맑은 고딕"/>
               </a:rPr>
-              <a:t>pool + P6 — 16축 조건의 메모리 근거 소멸(20축까지 초과 0건), 두 케이스 모두 ★5 (예산 상한 스윕은 원값을 더 낮추는 선택 과제)</a:t>
+              <a:t>pool + P6 — 16축 조건의 메모리 근거 소멸(20축까지 초과 0건). 잔여 과제는 두 케이스의 경계 직상뿐 — P95 1.32%(★5 경계)·최대 4.0%(★4 경계), 예산 상한 스윕 후속</a:t>
             </a:r>
           </a:p>
         </p:txBody>
@@ -7398,30 +7398,30 @@
                           </a:solidFill>
                           <a:latin typeface="맑은 고딕"/>
                         </a:rPr>
+                        <a:t>★4</a:t>
+                      </a:r>
+                    </a:p>
+                  </a:txBody>
+                  <a:tcPr marL="50800" marR="50800" marT="12700" marB="12700" anchor="ctr">
+                    <a:solidFill>
+                      <a:srgbClr val="FFFFFF"/>
+                    </a:solidFill>
+                  </a:tcPr>
+                </a:tc>
+                <a:tc>
+                  <a:txBody>
+                    <a:bodyPr/>
+                    <a:lstStyle/>
+                    <a:p>
+                      <a:pPr algn="ctr"/>
+                      <a:r>
+                        <a:rPr sz="1250" b="0">
+                          <a:solidFill>
+                            <a:srgbClr val="262626"/>
+                          </a:solidFill>
+                          <a:latin typeface="맑은 고딕"/>
+                        </a:rPr>
                         <a:t>★3</a:t>
-                      </a:r>
-                    </a:p>
-                  </a:txBody>
-                  <a:tcPr marL="50800" marR="50800" marT="12700" marB="12700" anchor="ctr">
-                    <a:solidFill>
-                      <a:srgbClr val="FFFFFF"/>
-                    </a:solidFill>
-                  </a:tcPr>
-                </a:tc>
-                <a:tc>
-                  <a:txBody>
-                    <a:bodyPr/>
-                    <a:lstStyle/>
-                    <a:p>
-                      <a:pPr algn="ctr"/>
-                      <a:r>
-                        <a:rPr sz="1250" b="0">
-                          <a:solidFill>
-                            <a:srgbClr val="262626"/>
-                          </a:solidFill>
-                          <a:latin typeface="맑은 고딕"/>
-                        </a:rPr>
-                        <a:t>★2</a:t>
                       </a:r>
                     </a:p>
                   </a:txBody>
@@ -7880,7 +7880,7 @@
                           </a:solidFill>
                           <a:latin typeface="맑은 고딕"/>
                         </a:rPr>
-                        <a:t>★3 (결함 11)</a:t>
+                        <a:t>★1 (결함 11)</a:t>
                       </a:r>
                     </a:p>
                   </a:txBody>
@@ -7903,7 +7903,7 @@
                           </a:solidFill>
                           <a:latin typeface="맑은 고딕"/>
                         </a:rPr>
-                        <a:t>★5 (결함 0)</a:t>
+                        <a:t>★4 (결함 0)</a:t>
                       </a:r>
                     </a:p>
                   </a:txBody>
@@ -7997,7 +7997,7 @@
                           </a:solidFill>
                           <a:latin typeface="맑은 고딕"/>
                         </a:rPr>
-                        <a:t>★5 (결함 0)</a:t>
+                        <a:t>★3 (결함 0)</a:t>
                       </a:r>
                     </a:p>
                   </a:txBody>
@@ -8323,7 +8323,7 @@
                 </a:solidFill>
                 <a:latin typeface="맑은 고딕"/>
               </a:rPr>
-              <a:t>*구 4-10축 스윕의 관측 하한(censored) — 정식 재판정 후속  ·  수치 출처: 60·62·63·66 (raw 재검산 가능)  ·  RU 사다리 = 2026-08-14 확정 20%p 등분 (★5 ≤20%)</a:t>
+              <a:t>*구 4-10축 스윕의 관측 하한(censored) — 정식 재판정 후속  ·  수치 출처: 60·62·63·66 (raw 재검산 가능)  ·  RU 사다리 = 2026-08-14 최종 로그 4등분 (★5 ≤1%)</a:t>
             </a:r>
           </a:p>
         </p:txBody>
@@ -11163,7 +11163,7 @@
                           </a:solidFill>
                           <a:latin typeface="맑은 고딕"/>
                         </a:rPr>
-                        <a:t>≤20%</a:t>
+                        <a:t>≤1%</a:t>
                       </a:r>
                     </a:p>
                   </a:txBody>
@@ -11186,7 +11186,7 @@
                           </a:solidFill>
                           <a:latin typeface="맑은 고딕"/>
                         </a:rPr>
-                        <a:t>≤40%</a:t>
+                        <a:t>≤3.2%</a:t>
                       </a:r>
                     </a:p>
                   </a:txBody>
@@ -11209,7 +11209,7 @@
                           </a:solidFill>
                           <a:latin typeface="맑은 고딕"/>
                         </a:rPr>
-                        <a:t>≤60%</a:t>
+                        <a:t>≤10%</a:t>
                       </a:r>
                     </a:p>
                   </a:txBody>
@@ -11232,7 +11232,7 @@
                           </a:solidFill>
                           <a:latin typeface="맑은 고딕"/>
                         </a:rPr>
-                        <a:t>≤80%</a:t>
+                        <a:t>≤32%</a:t>
                       </a:r>
                     </a:p>
                   </a:txBody>
@@ -11359,7 +11359,7 @@
                 </a:solidFill>
                 <a:latin typeface="맑은 고딕"/>
               </a:rPr>
-              <a:t>20%p 등분 — 시간 사다리와 동일 눈금 (기밀성은 실측 앵커 등분, 3차). 저사용 구간 변별은 원값 r% 병기로</a:t>
+              <a:t>[1%,100%] 로그 4등분 — ★5(≤1%) = 실사용 최대(≈10축)까지 성장(약 100배)해도 한도 내. 1칸 = √10 ≈ 3.2배 (20%p에서 복귀)</a:t>
             </a:r>
           </a:p>
         </p:txBody>
@@ -11924,7 +11924,7 @@
                           </a:solidFill>
                           <a:latin typeface="맑은 고딕"/>
                         </a:rPr>
-                        <a:t>≤12%</a:t>
+                        <a:t>≤20%</a:t>
                       </a:r>
                     </a:p>
                   </a:txBody>
@@ -11947,7 +11947,7 @@
                           </a:solidFill>
                           <a:latin typeface="맑은 고딕"/>
                         </a:rPr>
-                        <a:t>≤30%</a:t>
+                        <a:t>≤40%</a:t>
                       </a:r>
                     </a:p>
                   </a:txBody>
@@ -11970,7 +11970,7 @@
                           </a:solidFill>
                           <a:latin typeface="맑은 고딕"/>
                         </a:rPr>
-                        <a:t>≤48%</a:t>
+                        <a:t>≤60%</a:t>
                       </a:r>
                     </a:p>
                   </a:txBody>
@@ -11993,7 +11993,7 @@
                           </a:solidFill>
                           <a:latin typeface="맑은 고딕"/>
                         </a:rPr>
-                        <a:t>≤66%</a:t>
+                        <a:t>≤80%</a:t>
                       </a:r>
                     </a:p>
                   </a:txBody>
@@ -12016,7 +12016,7 @@
                           </a:solidFill>
                           <a:latin typeface="맑은 고딕"/>
                         </a:rPr>
-                        <a:t>≤84%</a:t>
+                        <a:t>&lt;100%</a:t>
                       </a:r>
                     </a:p>
                   </a:txBody>
@@ -12039,7 +12039,7 @@
                           </a:solidFill>
                           <a:latin typeface="맑은 고딕"/>
                         </a:rPr>
-                        <a:t>&gt;84%</a:t>
+                        <a:t>100%</a:t>
                       </a:r>
                     </a:p>
                   </a:txBody>
@@ -12120,7 +12120,7 @@
                 </a:solidFill>
                 <a:latin typeface="맑은 고딕"/>
               </a:rPr>
-              <a:t>실측 앵커 등분 (3차 개정): naive SAOP 실측 66% = ★2 · 1:1 실측 30% = ★4, 18%p 등간격 (경계 포함 ≤)</a:t>
+              <a:t>무노출 0% - 전량 공개 100% 사이 20%p 등분 (경계 포함 — TB·RU와 동일 규약)</a:t>
             </a:r>
           </a:p>
           <a:p>
@@ -12152,7 +12152,7 @@
                 </a:solidFill>
                 <a:latin typeface="맑은 고딕"/>
               </a:rPr>
-              <a:t>★4 이상 = 1:1 협상(실측 30%) 수준 · ★2 이하 = naive(실측 66%)와 다를 바 없음</a:t>
+              <a:t>1:1 협상의 실측 노출 ≈ 29% → "★4 이상 = 일반 2인 협상 수준으로 지킨다"</a:t>
             </a:r>
           </a:p>
         </p:txBody>
@@ -14207,7 +14207,7 @@
                           </a:solidFill>
                           <a:latin typeface="맑은 고딕"/>
                         </a:rPr>
-                        <a:t>31.7% ★3</a:t>
+                        <a:t>31.7% ★4</a:t>
                       </a:r>
                     </a:p>
                   </a:txBody>
@@ -14230,7 +14230,7 @@
                           </a:solidFill>
                           <a:latin typeface="맑은 고딕"/>
                         </a:rPr>
-                        <a:t>48.3% ★2</a:t>
+                        <a:t>48.3% ★3</a:t>
                       </a:r>
                     </a:p>
                   </a:txBody>
